--- a/docs/webinar/E2E-2/E2E-2-ficha.pptx
+++ b/docs/webinar/E2E-2/E2E-2-ficha.pptx
@@ -108,7 +108,7 @@
   <p:extLst>
     <p:ext uri="{521415D9-36F7-43E2-AB2F-B90AF26B5E84}">
       <p14:sectionLst xmlns:p14="http://schemas.microsoft.com/office/powerpoint/2010/main">
-        <p14:section name="Ficha del taller" id="{70e63cac-3ab2-85dd-0b28-1d9808bc529e}">
+        <p14:section name="Ficha del taller" id="{1e060ab0-0978-2f6f-6f8c-d18bf1ffaed1}">
           <p14:sldIdLst>
             <p14:sldId id="256"/>
             <p14:sldId id="257"/>
@@ -862,7 +862,7 @@
                   <a:srgbClr val="696969"/>
                 </a:solidFill>
               </a:rPr>
-              <a:t>pm-method 2.4.0 · Webinar E2E-2 · Ficha del taller</a:t>
+              <a:t>pm-method 2.5.0 · Webinar E2E-2 · Ficha del taller</a:t>
             </a:r>
             <a:endParaRPr lang="en-US" sz="1000" dirty="0"/>
           </a:p>
@@ -1102,7 +1102,7 @@
                   <a:srgbClr val="696969"/>
                 </a:solidFill>
               </a:rPr>
-              <a:t>pm-method 2.4.0 · Webinar E2E-2 · Ficha del taller</a:t>
+              <a:t>pm-method 2.5.0 · Webinar E2E-2 · Ficha del taller</a:t>
             </a:r>
             <a:endParaRPr lang="en-US" sz="1000" dirty="0"/>
           </a:p>
@@ -1535,7 +1535,7 @@
                 <a:ea typeface="Arial" pitchFamily="34" charset="-122"/>
                 <a:cs typeface="Arial" pitchFamily="34" charset="-120"/>
               </a:rPr>
-              <a:t>Taller · 2 clases de 90 minutos · Webinar pm-method 2.4.0 · E2E-2</a:t>
+              <a:t>Taller · 2 clases de 90 minutos · Webinar pm-method 2.5.0 · E2E-2</a:t>
             </a:r>
             <a:endParaRPr lang="en-US" sz="1400" dirty="0"/>
           </a:p>

--- a/docs/webinar/E2E-2/E2E-2-ficha.pptx
+++ b/docs/webinar/E2E-2/E2E-2-ficha.pptx
@@ -108,7 +108,7 @@
   <p:extLst>
     <p:ext uri="{521415D9-36F7-43E2-AB2F-B90AF26B5E84}">
       <p14:sectionLst xmlns:p14="http://schemas.microsoft.com/office/powerpoint/2010/main">
-        <p14:section name="Ficha del taller" id="{1e060ab0-0978-2f6f-6f8c-d18bf1ffaed1}">
+        <p14:section name="Ficha del taller" id="{3ed987eb-859c-7225-f801-58f76ca33280}">
           <p14:sldIdLst>
             <p14:sldId id="256"/>
             <p14:sldId id="257"/>
@@ -862,7 +862,7 @@
                   <a:srgbClr val="696969"/>
                 </a:solidFill>
               </a:rPr>
-              <a:t>pm-method 2.5.0 · Webinar E2E-2 · Ficha del taller</a:t>
+              <a:t>pm-method 2.5.1 · Webinar E2E-2 · Ficha del taller</a:t>
             </a:r>
             <a:endParaRPr lang="en-US" sz="1000" dirty="0"/>
           </a:p>
@@ -1102,7 +1102,7 @@
                   <a:srgbClr val="696969"/>
                 </a:solidFill>
               </a:rPr>
-              <a:t>pm-method 2.5.0 · Webinar E2E-2 · Ficha del taller</a:t>
+              <a:t>pm-method 2.5.1 · Webinar E2E-2 · Ficha del taller</a:t>
             </a:r>
             <a:endParaRPr lang="en-US" sz="1000" dirty="0"/>
           </a:p>
@@ -1535,7 +1535,7 @@
                 <a:ea typeface="Arial" pitchFamily="34" charset="-122"/>
                 <a:cs typeface="Arial" pitchFamily="34" charset="-120"/>
               </a:rPr>
-              <a:t>Taller · 2 clases de 90 minutos · Webinar pm-method 2.5.0 · E2E-2</a:t>
+              <a:t>Taller · 2 clases de 90 minutos · Webinar pm-method 2.5.1 · E2E-2</a:t>
             </a:r>
             <a:endParaRPr lang="en-US" sz="1400" dirty="0"/>
           </a:p>
@@ -2858,7 +2858,7 @@
                 <a:ea typeface="Arial" pitchFamily="34" charset="-122"/>
                 <a:cs typeface="Arial" pitchFamily="34" charset="-120"/>
               </a:rPr>
-              <a:t>Calcula camino crítico, reserva, capacidad del release e impacto de cada cambio</a:t>
+              <a:t>Calcula camino crítico, capacidad e impacto, y la matriz de cada decisión</a:t>
             </a:r>
             <a:endParaRPr lang="en-US" sz="1600" dirty="0"/>
           </a:p>
@@ -3094,7 +3094,7 @@
                 <a:ea typeface="Arial" pitchFamily="34" charset="-122"/>
                 <a:cs typeface="Arial" pitchFamily="34" charset="-120"/>
               </a:rPr>
-              <a:t>La junta aprueba el plan de excepción</a:t>
+              <a:t>La junta elige entre rechazar, diferir o pedir un plan de excepción</a:t>
             </a:r>
             <a:endParaRPr lang="en-US" sz="1600" dirty="0"/>
           </a:p>
@@ -3174,7 +3174,7 @@
                 <a:ea typeface="Arial" pitchFamily="34" charset="-122"/>
                 <a:cs typeface="Arial" pitchFamily="34" charset="-120"/>
               </a:rPr>
-              <a:t>El agente mide e informa quién tiene que decidir; no aprueba cambios. Cada decisión queda registrada con su autor y su motivo.</a:t>
+              <a:t>El agente mide, compara e informa quién decide; no aprueba cambios. Cada decisión queda registrada con su autor, su motivo y su matriz.</a:t>
             </a:r>
             <a:endParaRPr lang="en-US" sz="1600" dirty="0"/>
           </a:p>
@@ -3701,7 +3701,7 @@
                 <a:ea typeface="Arial" pitchFamily="34" charset="-122"/>
                 <a:cs typeface="Arial" pitchFamily="34" charset="-120"/>
               </a:rPr>
-              <a:t>Presupuesto, business case, tolerancias y autoridad</a:t>
+              <a:t>Presupuesto, business case, autoridad y decisión del R1</a:t>
             </a:r>
             <a:endParaRPr lang="en-US" sz="1600" dirty="0"/>
           </a:p>
@@ -3937,7 +3937,7 @@
                 <a:ea typeface="Arial" pitchFamily="34" charset="-122"/>
                 <a:cs typeface="Arial" pitchFamily="34" charset="-120"/>
               </a:rPr>
-              <a:t>Excepción: informe, plan y puerta de la junta</a:t>
+              <a:t>Excepción: matriz para la junta, informe, plan y puerta</a:t>
             </a:r>
             <a:endParaRPr lang="en-US" sz="1600" dirty="0"/>
           </a:p>
